--- a/smoke_samples/05_bullet_styles.pptx
+++ b/smoke_samples/05_bullet_styles.pptx
@@ -230,7 +230,7 @@
         <p:spPr>
           <a:xfrm>
             <a:off x="457200" y="274638"/>
-            <a:ext cx="8230200" cy="1143000"/>
+            <a:ext cx="8229600" cy="1143000"/>
           </a:xfrm>
           <a:prstGeom prst="rect">
             <a:avLst/>
@@ -243,7 +243,7 @@
           <a:p>
             <a:pPr algn="l"/>
             <a:r>
-              <a:rPr lang="en-US" sz="4400" b="1" i="0" dirty="0"/>
+              <a:rPr lang="en-US" sz="4400" b="0" i="0" u="none" dirty="0"/>
               <a:t>Bullet Styles</a:t>
             </a:r>
           </a:p>
@@ -258,7 +258,7 @@
         <p:spPr>
           <a:xfrm>
             <a:off x="457200" y="1600200"/>
-            <a:ext cx="8230200" cy="4572000"/>
+            <a:ext cx="8229600" cy="4572000"/>
           </a:xfrm>
           <a:prstGeom prst="rect">
             <a:avLst/>
@@ -273,7 +273,7 @@
               <a:buChar char="•"/>
             </a:pPr>
             <a:r>
-              <a:rPr lang="en-US" sz="2800" b="0" i="0" dirty="0"/>
+              <a:rPr lang="en-US" sz="2800" b="0" i="0" u="none" dirty="0"/>
               <a:t>Default bullet style</a:t>
             </a:r>
           </a:p>
@@ -282,7 +282,7 @@
               <a:buChar char="•"/>
             </a:pPr>
             <a:r>
-              <a:rPr lang="en-US" sz="2800" b="0" i="0" dirty="0"/>
+              <a:rPr lang="en-US" sz="2800" b="0" i="0" u="none" dirty="0"/>
               <a:t>Another bullet point</a:t>
             </a:r>
           </a:p>
@@ -291,7 +291,7 @@
               <a:buChar char="•"/>
             </a:pPr>
             <a:r>
-              <a:rPr lang="en-US" sz="2800" b="0" i="0" dirty="0"/>
+              <a:rPr lang="en-US" sz="2800" b="0" i="0" u="none" dirty="0"/>
               <a:t>Third bullet point</a:t>
             </a:r>
           </a:p>
@@ -336,7 +336,7 @@
         <p:spPr>
           <a:xfrm>
             <a:off x="457200" y="274638"/>
-            <a:ext cx="8230200" cy="1143000"/>
+            <a:ext cx="8229600" cy="1143000"/>
           </a:xfrm>
           <a:prstGeom prst="rect">
             <a:avLst/>
@@ -349,7 +349,7 @@
           <a:p>
             <a:pPr algn="l"/>
             <a:r>
-              <a:rPr lang="en-US" sz="4400" b="1" i="0" dirty="0"/>
+              <a:rPr lang="en-US" sz="4400" b="0" i="0" u="none" dirty="0"/>
               <a:t>Numbered Bullets</a:t>
             </a:r>
           </a:p>
@@ -364,7 +364,7 @@
         <p:spPr>
           <a:xfrm>
             <a:off x="457200" y="1600200"/>
-            <a:ext cx="8230200" cy="4572000"/>
+            <a:ext cx="8229600" cy="4572000"/>
           </a:xfrm>
           <a:prstGeom prst="rect">
             <a:avLst/>
@@ -379,7 +379,7 @@
               <a:buAutoNum type="arabicPeriod"/>
             </a:pPr>
             <a:r>
-              <a:rPr lang="en-US" sz="2800" b="0" i="0" dirty="0"/>
+              <a:rPr lang="en-US" sz="2800" b="0" i="0" u="none" dirty="0"/>
               <a:t>First item</a:t>
             </a:r>
           </a:p>
@@ -388,7 +388,7 @@
               <a:buAutoNum type="arabicPeriod"/>
             </a:pPr>
             <a:r>
-              <a:rPr lang="en-US" sz="2800" b="0" i="0" dirty="0"/>
+              <a:rPr lang="en-US" sz="2800" b="0" i="0" u="none" dirty="0"/>
               <a:t>Second item</a:t>
             </a:r>
           </a:p>
@@ -397,7 +397,7 @@
               <a:buAutoNum type="arabicPeriod"/>
             </a:pPr>
             <a:r>
-              <a:rPr lang="en-US" sz="2800" b="0" i="0" dirty="0"/>
+              <a:rPr lang="en-US" sz="2800" b="0" i="0" u="none" dirty="0"/>
               <a:t>Third item</a:t>
             </a:r>
           </a:p>

--- a/smoke_samples/05_bullet_styles.pptx
+++ b/smoke_samples/05_bullet_styles.pptx
@@ -266,14 +266,14 @@
           <a:noFill/>
         </p:spPr>
         <p:txBody>
-          <a:bodyPr wrap="square" rtlCol="0"/>
+          <a:bodyPr wrap="square" rtlCol="0" anchor="t"/>
           <a:lstStyle/>
           <a:p>
             <a:pPr lvl="0" marL="457200" indent="-457200">
               <a:buChar char="•"/>
             </a:pPr>
             <a:r>
-              <a:rPr lang="en-US" sz="2800" b="0" i="0" u="none" dirty="0"/>
+              <a:rPr lang="en-US" sz="1800" b="0" i="0" u="none" dirty="0"/>
               <a:t>Default bullet style</a:t>
             </a:r>
           </a:p>
@@ -282,7 +282,7 @@
               <a:buChar char="•"/>
             </a:pPr>
             <a:r>
-              <a:rPr lang="en-US" sz="2800" b="0" i="0" u="none" dirty="0"/>
+              <a:rPr lang="en-US" sz="1800" b="0" i="0" u="none" dirty="0"/>
               <a:t>Another bullet point</a:t>
             </a:r>
           </a:p>
@@ -291,7 +291,7 @@
               <a:buChar char="•"/>
             </a:pPr>
             <a:r>
-              <a:rPr lang="en-US" sz="2800" b="0" i="0" u="none" dirty="0"/>
+              <a:rPr lang="en-US" sz="1800" b="0" i="0" u="none" dirty="0"/>
               <a:t>Third bullet point</a:t>
             </a:r>
           </a:p>
@@ -372,14 +372,14 @@
           <a:noFill/>
         </p:spPr>
         <p:txBody>
-          <a:bodyPr wrap="square" rtlCol="0"/>
+          <a:bodyPr wrap="square" rtlCol="0" anchor="t"/>
           <a:lstStyle/>
           <a:p>
             <a:pPr lvl="0" marL="457200" indent="-457200">
               <a:buAutoNum type="arabicPeriod"/>
             </a:pPr>
             <a:r>
-              <a:rPr lang="en-US" sz="2800" b="0" i="0" u="none" dirty="0"/>
+              <a:rPr lang="en-US" sz="1800" b="0" i="0" u="none" dirty="0"/>
               <a:t>First item</a:t>
             </a:r>
           </a:p>
@@ -388,7 +388,7 @@
               <a:buAutoNum type="arabicPeriod"/>
             </a:pPr>
             <a:r>
-              <a:rPr lang="en-US" sz="2800" b="0" i="0" u="none" dirty="0"/>
+              <a:rPr lang="en-US" sz="1800" b="0" i="0" u="none" dirty="0"/>
               <a:t>Second item</a:t>
             </a:r>
           </a:p>
@@ -397,7 +397,7 @@
               <a:buAutoNum type="arabicPeriod"/>
             </a:pPr>
             <a:r>
-              <a:rPr lang="en-US" sz="2800" b="0" i="0" u="none" dirty="0"/>
+              <a:rPr lang="en-US" sz="1800" b="0" i="0" u="none" dirty="0"/>
               <a:t>Third item</a:t>
             </a:r>
           </a:p>

--- a/smoke_samples/05_bullet_styles.pptx
+++ b/smoke_samples/05_bullet_styles.pptx
@@ -202,11 +202,6 @@
 <file path=ppt/slides/slide1.xml><?xml version="1.0" encoding="utf-8"?>
 <p:sld xmlns:a="http://schemas.openxmlformats.org/drawingml/2006/main" xmlns:c="http://schemas.openxmlformats.org/drawingml/2006/chart" xmlns:r="http://schemas.openxmlformats.org/officeDocument/2006/relationships" xmlns:p="http://schemas.openxmlformats.org/presentationml/2006/main">
   <p:cSld>
-    <p:bg>
-      <p:bgRef idx="1001">
-        <a:schemeClr val="bg1"/>
-      </p:bgRef>
-    </p:bg>
     <p:spTree>
       <p:nvGrpSpPr>
         <p:cNvPr id="1" name=""/>
@@ -308,11 +303,6 @@
 <file path=ppt/slides/slide2.xml><?xml version="1.0" encoding="utf-8"?>
 <p:sld xmlns:a="http://schemas.openxmlformats.org/drawingml/2006/main" xmlns:c="http://schemas.openxmlformats.org/drawingml/2006/chart" xmlns:r="http://schemas.openxmlformats.org/officeDocument/2006/relationships" xmlns:p="http://schemas.openxmlformats.org/presentationml/2006/main">
   <p:cSld>
-    <p:bg>
-      <p:bgRef idx="1001">
-        <a:schemeClr val="bg1"/>
-      </p:bgRef>
-    </p:bg>
     <p:spTree>
       <p:nvGrpSpPr>
         <p:cNvPr id="1" name=""/>
@@ -412,9 +402,9 @@
 </file>
 
 <file path=ppt/theme/theme1.xml><?xml version="1.0" encoding="utf-8"?>
-<a:theme xmlns:a="http://schemas.openxmlformats.org/drawingml/2006/main" name="Office Theme">
+<a:theme xmlns:a="http://schemas.openxmlformats.org/drawingml/2006/main" name="Office Theme marketing">
   <a:themeElements>
-    <a:clrScheme name="Office">
+    <a:clrScheme name="Office colors">
       <a:dk1>
         <a:sysClr val="windowText" lastClr="000000"/>
       </a:dk1>
@@ -452,7 +442,7 @@
         <a:srgbClr val="800080"/>
       </a:folHlink>
     </a:clrScheme>
-    <a:fontScheme name="Office">
+    <a:fontScheme name="Office fonts">
       <a:majorFont>
         <a:latin typeface="Calibri"/>
         <a:ea typeface=""/>
